--- a/docs/pptx/Ch4_D1_Shortest_Path_BFS_Dijkstra.pptx
+++ b/docs/pptx/Ch4_D1_Shortest_Path_BFS_Dijkstra.pptx
@@ -513,10 +513,19 @@
           <a:lstStyle/>
           <a:p>
             <a:r>
-              <a:rPr lang="en-US" dirty="0"/>
-              <a:t/>
-            </a:r>
-            <a:endParaRPr lang="en-US" dirty="0"/>
+              <a:t>TITRE : Shortest Path - BFS &amp; Dijkstra</a:t>
+            </a:r>
+          </a:p>
+          <a:p>
+            <a:r>
+              <a:t>Durée : 2h</a:t>
+            </a:r>
+          </a:p>
+          <a:p/>
+          <a:p>
+            <a:r>
+              <a:t>Matériel : site → Monde 1 → Ch4 (graphe interactif Dijkstra)</a:t>
+            </a:r>
           </a:p>
         </p:txBody>
       </p:sp>
@@ -953,10 +962,25 @@
           <a:lstStyle/>
           <a:p>
             <a:r>
-              <a:rPr lang="en-US" dirty="0"/>
-              <a:t/>
-            </a:r>
-            <a:endParaRPr lang="en-US" dirty="0"/>
+              <a:t>PROF: Vocabulaire des graphes.</a:t>
+            </a:r>
+          </a:p>
+          <a:p/>
+          <a:p>
+            <a:r>
+              <a:t>Dessiner un graphe simple au tableau : 5 sommets, 6 arêtes.</a:t>
+            </a:r>
+          </a:p>
+          <a:p/>
+          <a:p>
+            <a:r>
+              <a:t>Demander : 'Donnez des exemples de graphes dans la vie réelle ?'</a:t>
+            </a:r>
+          </a:p>
+          <a:p>
+            <a:r>
+              <a:t>→ Réseau social, carte routière, réseau informatique, liens web</a:t>
+            </a:r>
           </a:p>
         </p:txBody>
       </p:sp>
@@ -1041,10 +1065,34 @@
           <a:lstStyle/>
           <a:p>
             <a:r>
-              <a:rPr lang="en-US" dirty="0"/>
-              <a:t/>
-            </a:r>
-            <a:endParaRPr lang="en-US" dirty="0"/>
+              <a:t>PROF: Pourquoi chercher le plus court chemin ?</a:t>
+            </a:r>
+          </a:p>
+          <a:p/>
+          <a:p>
+            <a:r>
+              <a:t>Applications concrètes :</a:t>
+            </a:r>
+          </a:p>
+          <a:p>
+            <a:r>
+              <a:t>- GPS : route la plus rapide</a:t>
+            </a:r>
+          </a:p>
+          <a:p>
+            <a:r>
+              <a:t>- Réseau : routage de paquets</a:t>
+            </a:r>
+          </a:p>
+          <a:p>
+            <a:r>
+              <a:t>- Jeux vidéo : pathfinding des personnages</a:t>
+            </a:r>
+          </a:p>
+          <a:p>
+            <a:r>
+              <a:t>- Logistique : livraison optimale</a:t>
+            </a:r>
           </a:p>
         </p:txBody>
       </p:sp>
@@ -1129,10 +1177,32 @@
           <a:lstStyle/>
           <a:p>
             <a:r>
-              <a:rPr lang="en-US" dirty="0"/>
-              <a:t/>
-            </a:r>
-            <a:endParaRPr lang="en-US" dirty="0"/>
+              <a:t>PROF: BFS = Breadth-First Search = Parcours en LARGEUR.</a:t>
+            </a:r>
+          </a:p>
+          <a:p/>
+          <a:p>
+            <a:r>
+              <a:t>Utilise une QUEUE (FIFO) pour explorer niveau par niveau.</a:t>
+            </a:r>
+          </a:p>
+          <a:p/>
+          <a:p>
+            <a:r>
+              <a:t>Pour graphes NON PONDÉRÉS seulement.</a:t>
+            </a:r>
+          </a:p>
+          <a:p/>
+          <a:p>
+            <a:r>
+              <a:t>Complexité : O(V + E) avec V=sommets, E=arêtes.</a:t>
+            </a:r>
+          </a:p>
+          <a:p/>
+          <a:p>
+            <a:r>
+              <a:t>Démonstration pas à pas au tableau.</a:t>
+            </a:r>
           </a:p>
         </p:txBody>
       </p:sp>
@@ -1217,10 +1287,30 @@
           <a:lstStyle/>
           <a:p>
             <a:r>
-              <a:rPr lang="en-US" dirty="0"/>
-              <a:t/>
-            </a:r>
-            <a:endParaRPr lang="en-US" dirty="0"/>
+              <a:t>PROF: Exercice BFS : tracer au tableau.</a:t>
+            </a:r>
+          </a:p>
+          <a:p/>
+          <a:p>
+            <a:r>
+              <a:t>Grapge : A-B, A-C, B-D, C-D, D-E, C-F</a:t>
+            </a:r>
+          </a:p>
+          <a:p>
+            <a:r>
+              <a:t>Trouver le chemin A → F.</a:t>
+            </a:r>
+          </a:p>
+          <a:p/>
+          <a:p>
+            <a:r>
+              <a:t>Queue : [A] → [B,C] → [D,C] → [D,F] → trouvé !</a:t>
+            </a:r>
+          </a:p>
+          <a:p>
+            <a:r>
+              <a:t>Chemin : A → C → F</a:t>
+            </a:r>
           </a:p>
         </p:txBody>
       </p:sp>
